--- a/curso/pptx/S23.pptx
+++ b/curso/pptx/S23.pptx
@@ -5543,7 +5543,7 @@
                 </a:solidFill>
                 <a:latin typeface="Nunito Sans"/>
               </a:rPr>
-              <a:t>«No está demostrado que no, así que sí»</a:t>
+              <a:t>“没有证明不是，所以是”</a:t>
             </a:r>
           </a:p>
           <a:p>
@@ -5568,7 +5568,7 @@
                 </a:solidFill>
                 <a:latin typeface="Nunito Sans"/>
               </a:rPr>
-              <a:t>La razón repite la conclusión</a:t>
+              <a:t>理由重复了结论</a:t>
             </a:r>
           </a:p>
         </p:txBody>
@@ -5698,7 +5698,7 @@
                 </a:solidFill>
                 <a:latin typeface="Nunito Sans"/>
               </a:rPr>
-              <a:t>«Hemos buscado bien y no hay pruebas: probablemente no»</a:t>
+              <a:t>“我们认真找过了，没有证据：大概不是”</a:t>
             </a:r>
           </a:p>
           <a:p>
@@ -5723,7 +5723,7 @@
                 </a:solidFill>
                 <a:latin typeface="Nunito Sans"/>
               </a:rPr>
-              <a:t>«Todavía no lo sabemos», sin concluir nada</a:t>
+              <a:t>“我们还不知道”，不下任何结论</a:t>
             </a:r>
           </a:p>
           <a:p>
@@ -5748,7 +5748,7 @@
                 </a:solidFill>
                 <a:latin typeface="Nunito Sans"/>
               </a:rPr>
-              <a:t>Una razón nueva, que no depende de la conclusión</a:t>
+              <a:t>一个新的理由，不依赖结论</a:t>
             </a:r>
           </a:p>
         </p:txBody>
@@ -7542,7 +7542,7 @@
                 </a:solidFill>
                 <a:latin typeface="Nunito Sans"/>
               </a:rPr>
-              <a:t>Ignorancia</a:t>
+              <a:t>无知</a:t>
             </a:r>
             <a:r>
               <a:rPr sz="2800" b="0">
@@ -7551,7 +7551,7 @@
                 </a:solidFill>
                 <a:latin typeface="Nunito Sans"/>
               </a:rPr>
-              <a:t>: no saber algo</a:t>
+              <a:t>：不知道某件事</a:t>
             </a:r>
           </a:p>
           <a:p>
@@ -7576,7 +7576,7 @@
                 </a:solidFill>
                 <a:latin typeface="Nunito Sans"/>
               </a:rPr>
-              <a:t>No saber que es falso </a:t>
+              <a:t>不知道它是假的，</a:t>
             </a:r>
             <a:r>
               <a:rPr sz="2800" b="1">
@@ -7585,7 +7585,7 @@
                 </a:solidFill>
                 <a:latin typeface="Nunito Sans"/>
               </a:rPr>
-              <a:t>no</a:t>
+              <a:t>不</a:t>
             </a:r>
             <a:r>
               <a:rPr sz="2800" b="0">
@@ -7594,7 +7594,7 @@
                 </a:solidFill>
                 <a:latin typeface="Nunito Sans"/>
               </a:rPr>
-              <a:t> lo hace verdadero</a:t>
+              <a:t>等于它是真的</a:t>
             </a:r>
           </a:p>
           <a:p>
@@ -7619,7 +7619,7 @@
                 </a:solidFill>
                 <a:latin typeface="Nunito Sans"/>
               </a:rPr>
-              <a:t>Normalmente, quien afirma algo tiene que dar las </a:t>
+              <a:t>通常，提出主张的人要给出</a:t>
             </a:r>
             <a:r>
               <a:rPr sz="2800" b="1">
@@ -7628,7 +7628,7 @@
                 </a:solidFill>
                 <a:latin typeface="Nunito Sans"/>
               </a:rPr>
-              <a:t>pruebas</a:t>
+              <a:t>证据</a:t>
             </a:r>
           </a:p>
           <a:p>
@@ -7653,7 +7653,7 @@
                 </a:solidFill>
                 <a:latin typeface="Nunito Sans"/>
               </a:rPr>
-              <a:t>Pregunta: </a:t>
+              <a:t>问题：</a:t>
             </a:r>
             <a:r>
               <a:rPr sz="2800" b="1">
@@ -7662,7 +7662,7 @@
                 </a:solidFill>
                 <a:latin typeface="Nunito Sans"/>
               </a:rPr>
-              <a:t>¿cómo lo sabes? ¿Qué pruebas hay a favor?</a:t>
+              <a:t>你怎么知道的？有什么证据支持？</a:t>
             </a:r>
           </a:p>
         </p:txBody>
@@ -7896,7 +7896,7 @@
                 </a:solidFill>
                 <a:latin typeface="Nunito Sans"/>
               </a:rPr>
-              <a:t>También se llama </a:t>
+              <a:t>也叫</a:t>
             </a:r>
             <a:r>
               <a:rPr sz="2800" b="1">
@@ -7905,7 +7905,7 @@
                 </a:solidFill>
                 <a:latin typeface="Nunito Sans"/>
               </a:rPr>
-              <a:t>petición de principio</a:t>
+              <a:t>预期理由</a:t>
             </a:r>
           </a:p>
           <a:p>
@@ -7930,7 +7930,7 @@
                 </a:solidFill>
                 <a:latin typeface="Nunito Sans"/>
               </a:rPr>
-              <a:t>Da vueltas en </a:t>
+              <a:t>在</a:t>
             </a:r>
             <a:r>
               <a:rPr sz="2800" b="1">
@@ -7939,7 +7939,7 @@
                 </a:solidFill>
                 <a:latin typeface="Nunito Sans"/>
               </a:rPr>
-              <a:t>círculo</a:t>
+              <a:t>圈子</a:t>
             </a:r>
             <a:r>
               <a:rPr sz="2800" b="0">
@@ -7948,7 +7948,7 @@
                 </a:solidFill>
                 <a:latin typeface="Nunito Sans"/>
               </a:rPr>
-              <a:t> y no avanza</a:t>
+              <a:t>里打转，没有前进</a:t>
             </a:r>
           </a:p>
           <a:p>
@@ -7973,7 +7973,7 @@
                 </a:solidFill>
                 <a:latin typeface="Nunito Sans"/>
               </a:rPr>
-              <a:t>Dice lo mismo con otras palabras</a:t>
+              <a:t>用别的话说了同样的东西</a:t>
             </a:r>
           </a:p>
           <a:p>
@@ -7998,7 +7998,7 @@
                 </a:solidFill>
                 <a:latin typeface="Nunito Sans"/>
               </a:rPr>
-              <a:t>Pregunta: </a:t>
+              <a:t>问题：</a:t>
             </a:r>
             <a:r>
               <a:rPr sz="2800" b="1">
@@ -8007,7 +8007,7 @@
                 </a:solidFill>
                 <a:latin typeface="Nunito Sans"/>
               </a:rPr>
-              <a:t>¿la razón dice algo distinto de la conclusión?</a:t>
+              <a:t>理由说的和结论不一样吗？</a:t>
             </a:r>
           </a:p>
         </p:txBody>

--- a/curso/pptx/S23.pptx
+++ b/curso/pptx/S23.pptx
@@ -4439,7 +4439,7 @@
                 </a:solidFill>
                 <a:latin typeface="Nunito Sans"/>
               </a:rPr>
-              <a:t>Dylan：“Kevin 肯定在考试里作弊了。没人能证明他没作弊。”</a:t>
+              <a:t>一个男孩：“一个同学肯定在考试里作弊了。没人能证明他没作弊。”</a:t>
             </a:r>
           </a:p>
         </p:txBody>
@@ -4487,7 +4487,7 @@
                 </a:solidFill>
                 <a:latin typeface="Nunito Sans"/>
               </a:rPr>
-              <a:t>Dylan 给了什么理由？没有人能证明相反的事。</a:t>
+              <a:t>这个男孩给了什么理由？没有人能证明相反的事。</a:t>
             </a:r>
           </a:p>
           <a:p>
@@ -4748,7 +4748,7 @@
                 </a:solidFill>
                 <a:latin typeface="Nunito Sans"/>
               </a:rPr>
-              <a:t>Yasmin：“这个新闻应用说的是真话。”Leire：“你怎么知道？”Yasmin：“因为应用里写着它所有的新闻都是真的。”</a:t>
+              <a:t>一个女孩：“这个新闻应用说的是真话。”一个同学：“你怎么知道？”这个女孩：“因为应用里写着它所有的新闻都是真的。”</a:t>
             </a:r>
           </a:p>
         </p:txBody>
@@ -5057,7 +5057,7 @@
                 </a:solidFill>
                 <a:latin typeface="Nunito Sans"/>
               </a:rPr>
-              <a:t>教导主任：“没有证据表明 Kevin 在考试里作弊。所以不处罚他。”</a:t>
+              <a:t>教导主任：“没有证据表明一个男孩在考试里作弊。所以不处罚他。”</a:t>
             </a:r>
           </a:p>
         </p:txBody>
